--- a/paper/latex/figures/pipeline_revised.pptx
+++ b/paper/latex/figures/pipeline_revised.pptx
@@ -104,6 +104,11 @@
       </a:defRPr>
     </a:lvl9pPr>
   </p:defaultTextStyle>
+  <p:extLst>
+    <p:ext uri="{EFAFB233-063F-42B5-8137-9DF3F51BA10A}">
+      <p15:sldGuideLst xmlns:p15="http://schemas.microsoft.com/office/powerpoint/2012/main"/>
+    </p:ext>
+  </p:extLst>
 </p:presentation>
 </file>
 
@@ -256,7 +261,7 @@
           <a:p>
             <a:fld id="{D43A5C10-A461-F544-9C27-1914059AB107}" type="datetimeFigureOut">
               <a:rPr kumimoji="1" lang="ko-Kore-KR" altLang="en-US" smtClean="0"/>
-              <a:t>2026. 6. 28.</a:t>
+              <a:t>2026. 6. 29.</a:t>
             </a:fld>
             <a:endParaRPr kumimoji="1" lang="ko-Kore-KR" altLang="en-US"/>
           </a:p>
@@ -456,7 +461,7 @@
           <a:p>
             <a:fld id="{D43A5C10-A461-F544-9C27-1914059AB107}" type="datetimeFigureOut">
               <a:rPr kumimoji="1" lang="ko-Kore-KR" altLang="en-US" smtClean="0"/>
-              <a:t>2026. 6. 28.</a:t>
+              <a:t>2026. 6. 29.</a:t>
             </a:fld>
             <a:endParaRPr kumimoji="1" lang="ko-Kore-KR" altLang="en-US"/>
           </a:p>
@@ -666,7 +671,7 @@
           <a:p>
             <a:fld id="{D43A5C10-A461-F544-9C27-1914059AB107}" type="datetimeFigureOut">
               <a:rPr kumimoji="1" lang="ko-Kore-KR" altLang="en-US" smtClean="0"/>
-              <a:t>2026. 6. 28.</a:t>
+              <a:t>2026. 6. 29.</a:t>
             </a:fld>
             <a:endParaRPr kumimoji="1" lang="ko-Kore-KR" altLang="en-US"/>
           </a:p>
@@ -866,7 +871,7 @@
           <a:p>
             <a:fld id="{D43A5C10-A461-F544-9C27-1914059AB107}" type="datetimeFigureOut">
               <a:rPr kumimoji="1" lang="ko-Kore-KR" altLang="en-US" smtClean="0"/>
-              <a:t>2026. 6. 28.</a:t>
+              <a:t>2026. 6. 29.</a:t>
             </a:fld>
             <a:endParaRPr kumimoji="1" lang="ko-Kore-KR" altLang="en-US"/>
           </a:p>
@@ -1142,7 +1147,7 @@
           <a:p>
             <a:fld id="{D43A5C10-A461-F544-9C27-1914059AB107}" type="datetimeFigureOut">
               <a:rPr kumimoji="1" lang="ko-Kore-KR" altLang="en-US" smtClean="0"/>
-              <a:t>2026. 6. 28.</a:t>
+              <a:t>2026. 6. 29.</a:t>
             </a:fld>
             <a:endParaRPr kumimoji="1" lang="ko-Kore-KR" altLang="en-US"/>
           </a:p>
@@ -1410,7 +1415,7 @@
           <a:p>
             <a:fld id="{D43A5C10-A461-F544-9C27-1914059AB107}" type="datetimeFigureOut">
               <a:rPr kumimoji="1" lang="ko-Kore-KR" altLang="en-US" smtClean="0"/>
-              <a:t>2026. 6. 28.</a:t>
+              <a:t>2026. 6. 29.</a:t>
             </a:fld>
             <a:endParaRPr kumimoji="1" lang="ko-Kore-KR" altLang="en-US"/>
           </a:p>
@@ -1825,7 +1830,7 @@
           <a:p>
             <a:fld id="{D43A5C10-A461-F544-9C27-1914059AB107}" type="datetimeFigureOut">
               <a:rPr kumimoji="1" lang="ko-Kore-KR" altLang="en-US" smtClean="0"/>
-              <a:t>2026. 6. 28.</a:t>
+              <a:t>2026. 6. 29.</a:t>
             </a:fld>
             <a:endParaRPr kumimoji="1" lang="ko-Kore-KR" altLang="en-US"/>
           </a:p>
@@ -1967,7 +1972,7 @@
           <a:p>
             <a:fld id="{D43A5C10-A461-F544-9C27-1914059AB107}" type="datetimeFigureOut">
               <a:rPr kumimoji="1" lang="ko-Kore-KR" altLang="en-US" smtClean="0"/>
-              <a:t>2026. 6. 28.</a:t>
+              <a:t>2026. 6. 29.</a:t>
             </a:fld>
             <a:endParaRPr kumimoji="1" lang="ko-Kore-KR" altLang="en-US"/>
           </a:p>
@@ -2080,7 +2085,7 @@
           <a:p>
             <a:fld id="{D43A5C10-A461-F544-9C27-1914059AB107}" type="datetimeFigureOut">
               <a:rPr kumimoji="1" lang="ko-Kore-KR" altLang="en-US" smtClean="0"/>
-              <a:t>2026. 6. 28.</a:t>
+              <a:t>2026. 6. 29.</a:t>
             </a:fld>
             <a:endParaRPr kumimoji="1" lang="ko-Kore-KR" altLang="en-US"/>
           </a:p>
@@ -2393,7 +2398,7 @@
           <a:p>
             <a:fld id="{D43A5C10-A461-F544-9C27-1914059AB107}" type="datetimeFigureOut">
               <a:rPr kumimoji="1" lang="ko-Kore-KR" altLang="en-US" smtClean="0"/>
-              <a:t>2026. 6. 28.</a:t>
+              <a:t>2026. 6. 29.</a:t>
             </a:fld>
             <a:endParaRPr kumimoji="1" lang="ko-Kore-KR" altLang="en-US"/>
           </a:p>
@@ -2682,7 +2687,7 @@
           <a:p>
             <a:fld id="{D43A5C10-A461-F544-9C27-1914059AB107}" type="datetimeFigureOut">
               <a:rPr kumimoji="1" lang="ko-Kore-KR" altLang="en-US" smtClean="0"/>
-              <a:t>2026. 6. 28.</a:t>
+              <a:t>2026. 6. 29.</a:t>
             </a:fld>
             <a:endParaRPr kumimoji="1" lang="ko-Kore-KR" altLang="en-US"/>
           </a:p>
@@ -2925,7 +2930,7 @@
           <a:p>
             <a:fld id="{D43A5C10-A461-F544-9C27-1914059AB107}" type="datetimeFigureOut">
               <a:rPr kumimoji="1" lang="ko-Kore-KR" altLang="en-US" smtClean="0"/>
-              <a:t>2026. 6. 28.</a:t>
+              <a:t>2026. 6. 29.</a:t>
             </a:fld>
             <a:endParaRPr kumimoji="1" lang="ko-Kore-KR" altLang="en-US"/>
           </a:p>
@@ -3678,6 +3683,121 @@
           </a:fontRef>
         </p:style>
       </p:cxnSp>
+      <p:sp>
+        <p:nvSpPr>
+          <p:cNvPr id="3" name="직사각형 2">
+            <a:extLst>
+              <a:ext uri="{FF2B5EF4-FFF2-40B4-BE49-F238E27FC236}">
+                <a16:creationId xmlns:a16="http://schemas.microsoft.com/office/drawing/2014/main" id="{1B6A38E2-0100-1109-A980-337195293480}"/>
+              </a:ext>
+            </a:extLst>
+          </p:cNvPr>
+          <p:cNvSpPr/>
+          <p:nvPr/>
+        </p:nvSpPr>
+        <p:spPr>
+          <a:xfrm>
+            <a:off x="7603067" y="1410346"/>
+            <a:ext cx="1633923" cy="326224"/>
+          </a:xfrm>
+          <a:prstGeom prst="rect">
+            <a:avLst/>
+          </a:prstGeom>
+          <a:solidFill>
+            <a:schemeClr val="bg1"/>
+          </a:solidFill>
+          <a:ln>
+            <a:noFill/>
+          </a:ln>
+        </p:spPr>
+        <p:style>
+          <a:lnRef idx="2">
+            <a:schemeClr val="accent1">
+              <a:shade val="15000"/>
+            </a:schemeClr>
+          </a:lnRef>
+          <a:fillRef idx="1">
+            <a:schemeClr val="accent1"/>
+          </a:fillRef>
+          <a:effectRef idx="0">
+            <a:schemeClr val="accent1"/>
+          </a:effectRef>
+          <a:fontRef idx="minor">
+            <a:schemeClr val="lt1"/>
+          </a:fontRef>
+        </p:style>
+        <p:txBody>
+          <a:bodyPr rtlCol="0" anchor="ctr"/>
+          <a:lstStyle/>
+          <a:p>
+            <a:pPr algn="ctr"/>
+            <a:endParaRPr kumimoji="1" lang="ko-Kore-KR" altLang="en-US"/>
+          </a:p>
+        </p:txBody>
+      </p:sp>
+      <p:sp>
+        <p:nvSpPr>
+          <p:cNvPr id="2" name="TextBox 1">
+            <a:extLst>
+              <a:ext uri="{FF2B5EF4-FFF2-40B4-BE49-F238E27FC236}">
+                <a16:creationId xmlns:a16="http://schemas.microsoft.com/office/drawing/2014/main" id="{F0348941-4F29-FF20-EF97-ADC41895A67B}"/>
+              </a:ext>
+            </a:extLst>
+          </p:cNvPr>
+          <p:cNvSpPr txBox="1"/>
+          <p:nvPr/>
+        </p:nvSpPr>
+        <p:spPr>
+          <a:xfrm>
+            <a:off x="7688737" y="1458092"/>
+            <a:ext cx="1734662" cy="338554"/>
+          </a:xfrm>
+          <a:prstGeom prst="rect">
+            <a:avLst/>
+          </a:prstGeom>
+          <a:noFill/>
+        </p:spPr>
+        <p:txBody>
+          <a:bodyPr wrap="square" rtlCol="0">
+            <a:spAutoFit/>
+          </a:bodyPr>
+          <a:lstStyle/>
+          <a:p>
+            <a:r>
+              <a:rPr kumimoji="1" lang="en-US" altLang="ko-Kore-KR" sz="1600" dirty="0">
+                <a:latin typeface="Times New Roman" panose="02020603050405020304" pitchFamily="18" charset="0"/>
+                <a:cs typeface="Times New Roman" panose="02020603050405020304" pitchFamily="18" charset="0"/>
+              </a:rPr>
+              <a:t>4</a:t>
+            </a:r>
+            <a:r>
+              <a:rPr kumimoji="1" lang="en-US" altLang="ko-KR" sz="1600" dirty="0">
+                <a:latin typeface="Times New Roman" panose="02020603050405020304" pitchFamily="18" charset="0"/>
+                <a:cs typeface="Times New Roman" panose="02020603050405020304" pitchFamily="18" charset="0"/>
+              </a:rPr>
+              <a:t>.</a:t>
+            </a:r>
+            <a:r>
+              <a:rPr kumimoji="1" lang="ko-KR" altLang="en-US" sz="1600" dirty="0">
+                <a:latin typeface="Times New Roman" panose="02020603050405020304" pitchFamily="18" charset="0"/>
+                <a:cs typeface="Times New Roman" panose="02020603050405020304" pitchFamily="18" charset="0"/>
+              </a:rPr>
+              <a:t> </a:t>
+            </a:r>
+            <a:r>
+              <a:rPr kumimoji="1" lang="en-US" altLang="ko-KR" sz="1600" dirty="0">
+                <a:latin typeface="Times New Roman" panose="02020603050405020304" pitchFamily="18" charset="0"/>
+                <a:cs typeface="Times New Roman" panose="02020603050405020304" pitchFamily="18" charset="0"/>
+              </a:rPr>
+              <a:t>FLIP Scoring</a:t>
+            </a:r>
+            <a:endParaRPr kumimoji="1" lang="ko-Kore-KR" altLang="en-US" sz="1600" dirty="0">
+              <a:latin typeface="Times New Roman" panose="02020603050405020304" pitchFamily="18" charset="0"/>
+              <a:cs typeface="Times New Roman" panose="02020603050405020304" pitchFamily="18" charset="0"/>
+            </a:endParaRPr>
+          </a:p>
+        </p:txBody>
+      </p:sp>
     </p:spTree>
     <p:extLst>
       <p:ext uri="{BB962C8B-B14F-4D97-AF65-F5344CB8AC3E}">
